--- a/Presentación App Mejora Continua.pptx
+++ b/Presentación App Mejora Continua.pptx
@@ -106,6 +106,11 @@
       </a:defRPr>
     </a:lvl9pPr>
   </p:defaultTextStyle>
+  <p:extLst>
+    <p:ext uri="{EFAFB233-063F-42B5-8137-9DF3F51BA10A}">
+      <p15:sldGuideLst xmlns:p15="http://schemas.microsoft.com/office/powerpoint/2012/main"/>
+    </p:ext>
+  </p:extLst>
 </p:presentation>
 </file>
 
@@ -258,7 +263,7 @@
           <a:p>
             <a:fld id="{16FDC51C-B564-4C8A-A0EA-06E1A36964C7}" type="datetimeFigureOut">
               <a:rPr lang="es-MX" smtClean="0"/>
-              <a:t>02/10/2026</a:t>
+              <a:t>08/10/2026</a:t>
             </a:fld>
             <a:endParaRPr lang="es-MX"/>
           </a:p>
@@ -458,7 +463,7 @@
           <a:p>
             <a:fld id="{16FDC51C-B564-4C8A-A0EA-06E1A36964C7}" type="datetimeFigureOut">
               <a:rPr lang="es-MX" smtClean="0"/>
-              <a:t>02/10/2026</a:t>
+              <a:t>08/10/2026</a:t>
             </a:fld>
             <a:endParaRPr lang="es-MX"/>
           </a:p>
@@ -668,7 +673,7 @@
           <a:p>
             <a:fld id="{16FDC51C-B564-4C8A-A0EA-06E1A36964C7}" type="datetimeFigureOut">
               <a:rPr lang="es-MX" smtClean="0"/>
-              <a:t>02/10/2026</a:t>
+              <a:t>08/10/2026</a:t>
             </a:fld>
             <a:endParaRPr lang="es-MX"/>
           </a:p>
@@ -868,7 +873,7 @@
           <a:p>
             <a:fld id="{16FDC51C-B564-4C8A-A0EA-06E1A36964C7}" type="datetimeFigureOut">
               <a:rPr lang="es-MX" smtClean="0"/>
-              <a:t>02/10/2026</a:t>
+              <a:t>08/10/2026</a:t>
             </a:fld>
             <a:endParaRPr lang="es-MX"/>
           </a:p>
@@ -1144,7 +1149,7 @@
           <a:p>
             <a:fld id="{16FDC51C-B564-4C8A-A0EA-06E1A36964C7}" type="datetimeFigureOut">
               <a:rPr lang="es-MX" smtClean="0"/>
-              <a:t>02/10/2026</a:t>
+              <a:t>08/10/2026</a:t>
             </a:fld>
             <a:endParaRPr lang="es-MX"/>
           </a:p>
@@ -1412,7 +1417,7 @@
           <a:p>
             <a:fld id="{16FDC51C-B564-4C8A-A0EA-06E1A36964C7}" type="datetimeFigureOut">
               <a:rPr lang="es-MX" smtClean="0"/>
-              <a:t>02/10/2026</a:t>
+              <a:t>08/10/2026</a:t>
             </a:fld>
             <a:endParaRPr lang="es-MX"/>
           </a:p>
@@ -1827,7 +1832,7 @@
           <a:p>
             <a:fld id="{16FDC51C-B564-4C8A-A0EA-06E1A36964C7}" type="datetimeFigureOut">
               <a:rPr lang="es-MX" smtClean="0"/>
-              <a:t>02/10/2026</a:t>
+              <a:t>08/10/2026</a:t>
             </a:fld>
             <a:endParaRPr lang="es-MX"/>
           </a:p>
@@ -1969,7 +1974,7 @@
           <a:p>
             <a:fld id="{16FDC51C-B564-4C8A-A0EA-06E1A36964C7}" type="datetimeFigureOut">
               <a:rPr lang="es-MX" smtClean="0"/>
-              <a:t>02/10/2026</a:t>
+              <a:t>08/10/2026</a:t>
             </a:fld>
             <a:endParaRPr lang="es-MX"/>
           </a:p>
@@ -2082,7 +2087,7 @@
           <a:p>
             <a:fld id="{16FDC51C-B564-4C8A-A0EA-06E1A36964C7}" type="datetimeFigureOut">
               <a:rPr lang="es-MX" smtClean="0"/>
-              <a:t>02/10/2026</a:t>
+              <a:t>08/10/2026</a:t>
             </a:fld>
             <a:endParaRPr lang="es-MX"/>
           </a:p>
@@ -2395,7 +2400,7 @@
           <a:p>
             <a:fld id="{16FDC51C-B564-4C8A-A0EA-06E1A36964C7}" type="datetimeFigureOut">
               <a:rPr lang="es-MX" smtClean="0"/>
-              <a:t>02/10/2026</a:t>
+              <a:t>08/10/2026</a:t>
             </a:fld>
             <a:endParaRPr lang="es-MX"/>
           </a:p>
@@ -2684,7 +2689,7 @@
           <a:p>
             <a:fld id="{16FDC51C-B564-4C8A-A0EA-06E1A36964C7}" type="datetimeFigureOut">
               <a:rPr lang="es-MX" smtClean="0"/>
-              <a:t>02/10/2026</a:t>
+              <a:t>08/10/2026</a:t>
             </a:fld>
             <a:endParaRPr lang="es-MX"/>
           </a:p>
@@ -2927,7 +2932,7 @@
           <a:p>
             <a:fld id="{16FDC51C-B564-4C8A-A0EA-06E1A36964C7}" type="datetimeFigureOut">
               <a:rPr lang="es-MX" smtClean="0"/>
-              <a:t>02/10/2026</a:t>
+              <a:t>08/10/2026</a:t>
             </a:fld>
             <a:endParaRPr lang="es-MX"/>
           </a:p>
@@ -3346,10 +3351,10 @@
       </p:grpSpPr>
       <p:pic>
         <p:nvPicPr>
-          <p:cNvPr id="2" name="Imagen 1" descr="Vista previa del código QR">
-            <a:extLst>
-              <a:ext uri="{FF2B5EF4-FFF2-40B4-BE49-F238E27FC236}">
-                <a16:creationId xmlns:a16="http://schemas.microsoft.com/office/drawing/2014/main" id="{323E9B5F-F0FE-095D-51F7-F41360B6D20E}"/>
+          <p:cNvPr id="5" name="Imagen 4">
+            <a:extLst>
+              <a:ext uri="{FF2B5EF4-FFF2-40B4-BE49-F238E27FC236}">
+                <a16:creationId xmlns:a16="http://schemas.microsoft.com/office/drawing/2014/main" id="{4810A6B7-95D6-92FF-2DF5-EA60F645A5FE}"/>
               </a:ext>
             </a:extLst>
           </p:cNvPr>
@@ -3366,74 +3371,95 @@
         </p:blipFill>
         <p:spPr>
           <a:xfrm>
-            <a:off x="823620" y="1115619"/>
-            <a:ext cx="4876800" cy="4876800"/>
+            <a:off x="665016" y="800100"/>
+            <a:ext cx="5219700" cy="5257800"/>
           </a:xfrm>
           <a:prstGeom prst="rect">
             <a:avLst/>
           </a:prstGeom>
         </p:spPr>
       </p:pic>
-      <p:pic>
-        <p:nvPicPr>
-          <p:cNvPr id="4" name="Imagen 3">
-            <a:extLst>
-              <a:ext uri="{FF2B5EF4-FFF2-40B4-BE49-F238E27FC236}">
-                <a16:creationId xmlns:a16="http://schemas.microsoft.com/office/drawing/2014/main" id="{2DA7D9A4-1610-8D37-2AE6-62CF605B1518}"/>
-              </a:ext>
-            </a:extLst>
-          </p:cNvPr>
-          <p:cNvPicPr>
-            <a:picLocks noChangeAspect="1"/>
-          </p:cNvPicPr>
+      <p:grpSp>
+        <p:nvGrpSpPr>
+          <p:cNvPr id="10" name="Grupo 9">
+            <a:extLst>
+              <a:ext uri="{FF2B5EF4-FFF2-40B4-BE49-F238E27FC236}">
+                <a16:creationId xmlns:a16="http://schemas.microsoft.com/office/drawing/2014/main" id="{23DE5831-CA85-4071-EE5E-F62F360734C5}"/>
+              </a:ext>
+            </a:extLst>
+          </p:cNvPr>
+          <p:cNvGrpSpPr/>
           <p:nvPr/>
-        </p:nvPicPr>
-        <p:blipFill>
-          <a:blip r:embed="rId3"/>
-          <a:stretch>
-            <a:fillRect/>
-          </a:stretch>
-        </p:blipFill>
-        <p:spPr>
+        </p:nvGrpSpPr>
+        <p:grpSpPr>
           <a:xfrm>
-            <a:off x="6653190" y="0"/>
+            <a:off x="6804025" y="0"/>
             <a:ext cx="5331023" cy="6858000"/>
+            <a:chOff x="6653190" y="0"/>
+            <a:chExt cx="5331023" cy="6858000"/>
           </a:xfrm>
-          <a:prstGeom prst="rect">
-            <a:avLst/>
-          </a:prstGeom>
-        </p:spPr>
-      </p:pic>
-      <p:pic>
-        <p:nvPicPr>
-          <p:cNvPr id="6" name="Imagen 5" descr="Vista previa del código QR">
-            <a:extLst>
-              <a:ext uri="{FF2B5EF4-FFF2-40B4-BE49-F238E27FC236}">
-                <a16:creationId xmlns:a16="http://schemas.microsoft.com/office/drawing/2014/main" id="{27857DCC-25F0-E567-F36C-FB0AC3D978E4}"/>
-              </a:ext>
-            </a:extLst>
-          </p:cNvPr>
-          <p:cNvPicPr>
-            <a:picLocks noChangeAspect="1"/>
-          </p:cNvPicPr>
-          <p:nvPr/>
-        </p:nvPicPr>
-        <p:blipFill>
-          <a:blip r:embed="rId2"/>
-          <a:stretch>
-            <a:fillRect/>
-          </a:stretch>
-        </p:blipFill>
-        <p:spPr>
-          <a:xfrm>
-            <a:off x="8190138" y="3974615"/>
-            <a:ext cx="1113851" cy="1113851"/>
-          </a:xfrm>
-          <a:prstGeom prst="rect">
-            <a:avLst/>
-          </a:prstGeom>
-        </p:spPr>
-      </p:pic>
+        </p:grpSpPr>
+        <p:pic>
+          <p:nvPicPr>
+            <p:cNvPr id="11" name="Imagen 10">
+              <a:extLst>
+                <a:ext uri="{FF2B5EF4-FFF2-40B4-BE49-F238E27FC236}">
+                  <a16:creationId xmlns:a16="http://schemas.microsoft.com/office/drawing/2014/main" id="{5F2CC3ED-8FEC-233D-2A67-E1AB96026113}"/>
+                </a:ext>
+              </a:extLst>
+            </p:cNvPr>
+            <p:cNvPicPr>
+              <a:picLocks noChangeAspect="1"/>
+            </p:cNvPicPr>
+            <p:nvPr/>
+          </p:nvPicPr>
+          <p:blipFill>
+            <a:blip r:embed="rId3"/>
+            <a:stretch>
+              <a:fillRect/>
+            </a:stretch>
+          </p:blipFill>
+          <p:spPr>
+            <a:xfrm>
+              <a:off x="6653190" y="0"/>
+              <a:ext cx="5331023" cy="6858000"/>
+            </a:xfrm>
+            <a:prstGeom prst="rect">
+              <a:avLst/>
+            </a:prstGeom>
+          </p:spPr>
+        </p:pic>
+        <p:pic>
+          <p:nvPicPr>
+            <p:cNvPr id="12" name="Imagen 11">
+              <a:extLst>
+                <a:ext uri="{FF2B5EF4-FFF2-40B4-BE49-F238E27FC236}">
+                  <a16:creationId xmlns:a16="http://schemas.microsoft.com/office/drawing/2014/main" id="{C08E607D-4A95-604C-FC62-A0A9E23CFAC7}"/>
+                </a:ext>
+              </a:extLst>
+            </p:cNvPr>
+            <p:cNvPicPr>
+              <a:picLocks noChangeAspect="1"/>
+            </p:cNvPicPr>
+            <p:nvPr/>
+          </p:nvPicPr>
+          <p:blipFill>
+            <a:blip r:embed="rId2"/>
+            <a:stretch>
+              <a:fillRect/>
+            </a:stretch>
+          </p:blipFill>
+          <p:spPr>
+            <a:xfrm>
+              <a:off x="8180813" y="3938211"/>
+              <a:ext cx="1149453" cy="1157843"/>
+            </a:xfrm>
+            <a:prstGeom prst="rect">
+              <a:avLst/>
+            </a:prstGeom>
+          </p:spPr>
+        </p:pic>
+      </p:grpSp>
     </p:spTree>
     <p:extLst>
       <p:ext uri="{BB962C8B-B14F-4D97-AF65-F5344CB8AC3E}">
